--- a/chapter6/parts/part-10-common-pitfalls/clip.pptx
+++ b/chapter6/parts/part-10-common-pitfalls/clip.pptx
@@ -4100,7 +4100,7 @@
               </a:defRPr>
             </a:pPr>
             <a:r>
-              <a:t>Chapter 6 — 10 Common Pitfalls</a:t>
+              <a:t>Chapter 6 — Common Pitfalls</a:t>
             </a:r>
           </a:p>
         </p:txBody>
@@ -4259,7 +4259,7 @@
               </a:defRPr>
             </a:pPr>
             <a:r>
-              <a:t>Chapter 6 — 10 Common Pitfalls</a:t>
+              <a:t>Chapter 6 — Common Pitfalls</a:t>
             </a:r>
           </a:p>
         </p:txBody>
@@ -4438,7 +4438,7 @@
               </a:defRPr>
             </a:pPr>
             <a:r>
-              <a:t>Chapter 6 — 10 Common Pitfalls</a:t>
+              <a:t>Chapter 6 — Common Pitfalls</a:t>
             </a:r>
           </a:p>
         </p:txBody>
@@ -4617,7 +4617,7 @@
               </a:defRPr>
             </a:pPr>
             <a:r>
-              <a:t>Chapter 6 — 10 Common Pitfalls</a:t>
+              <a:t>Chapter 6 — Common Pitfalls</a:t>
             </a:r>
           </a:p>
         </p:txBody>
@@ -4776,7 +4776,7 @@
               </a:defRPr>
             </a:pPr>
             <a:r>
-              <a:t>Chapter 6 — 10 Common Pitfalls</a:t>
+              <a:t>Chapter 6 — Common Pitfalls</a:t>
             </a:r>
           </a:p>
         </p:txBody>
@@ -4955,7 +4955,7 @@
               </a:defRPr>
             </a:pPr>
             <a:r>
-              <a:t>Chapter 6 — 10 Common Pitfalls</a:t>
+              <a:t>Chapter 6 — Common Pitfalls</a:t>
             </a:r>
           </a:p>
         </p:txBody>
@@ -5114,7 +5114,7 @@
               </a:defRPr>
             </a:pPr>
             <a:r>
-              <a:t>Chapter 6 — 10 Common Pitfalls</a:t>
+              <a:t>Chapter 6 — Common Pitfalls</a:t>
             </a:r>
           </a:p>
         </p:txBody>
@@ -5273,7 +5273,7 @@
               </a:defRPr>
             </a:pPr>
             <a:r>
-              <a:t>Chapter 6 — 10 Common Pitfalls</a:t>
+              <a:t>Chapter 6 — Common Pitfalls</a:t>
             </a:r>
           </a:p>
         </p:txBody>

--- a/chapter6/parts/part-10-common-pitfalls/clip.pptx
+++ b/chapter6/parts/part-10-common-pitfalls/clip.pptx
@@ -4184,10 +4184,12 @@
           </a:bodyPr>
           <a:lstStyle/>
           <a:p>
-            <a:pPr>
+            <a:pPr lvl="0" marL="457200" indent="-228600">
+              <a:buFont typeface="Calibri"/>
               <a:spcAft>
                 <a:spcPts val="1000"/>
               </a:spcAft>
+              <a:buSzPct val="100000"/>
               <a:buChar char="•"/>
               <a:lnSpc>
                 <a:spcPts val="2200"/>
@@ -4204,10 +4206,12 @@
             </a:r>
           </a:p>
           <a:p>
-            <a:pPr>
+            <a:pPr lvl="0" marL="457200" indent="-228600">
+              <a:buFont typeface="Calibri"/>
               <a:spcAft>
                 <a:spcPts val="1000"/>
               </a:spcAft>
+              <a:buSzPct val="100000"/>
               <a:buChar char="•"/>
               <a:lnSpc>
                 <a:spcPts val="2200"/>
@@ -4343,10 +4347,12 @@
           </a:bodyPr>
           <a:lstStyle/>
           <a:p>
-            <a:pPr>
+            <a:pPr lvl="0" marL="457200" indent="-228600">
+              <a:buFont typeface="Calibri"/>
               <a:spcAft>
                 <a:spcPts val="1000"/>
               </a:spcAft>
+              <a:buSzPct val="100000"/>
               <a:buChar char="•"/>
               <a:lnSpc>
                 <a:spcPts val="2200"/>
@@ -4363,10 +4369,12 @@
             </a:r>
           </a:p>
           <a:p>
-            <a:pPr>
+            <a:pPr lvl="0" marL="457200" indent="-228600">
+              <a:buFont typeface="Calibri"/>
               <a:spcAft>
                 <a:spcPts val="1000"/>
               </a:spcAft>
+              <a:buSzPct val="100000"/>
               <a:buChar char="•"/>
               <a:lnSpc>
                 <a:spcPts val="2200"/>
@@ -4383,10 +4391,12 @@
             </a:r>
           </a:p>
           <a:p>
-            <a:pPr>
+            <a:pPr lvl="0" marL="457200" indent="-228600">
+              <a:buFont typeface="Calibri"/>
               <a:spcAft>
                 <a:spcPts val="1000"/>
               </a:spcAft>
+              <a:buSzPct val="100000"/>
               <a:buChar char="•"/>
               <a:lnSpc>
                 <a:spcPts val="2200"/>
@@ -4522,10 +4532,12 @@
           </a:bodyPr>
           <a:lstStyle/>
           <a:p>
-            <a:pPr>
+            <a:pPr lvl="0" marL="457200" indent="-228600">
+              <a:buFont typeface="Calibri"/>
               <a:spcAft>
                 <a:spcPts val="1000"/>
               </a:spcAft>
+              <a:buSzPct val="100000"/>
               <a:buChar char="•"/>
               <a:lnSpc>
                 <a:spcPts val="2200"/>
@@ -4542,10 +4554,12 @@
             </a:r>
           </a:p>
           <a:p>
-            <a:pPr>
+            <a:pPr lvl="0" marL="457200" indent="-228600">
+              <a:buFont typeface="Calibri"/>
               <a:spcAft>
                 <a:spcPts val="1000"/>
               </a:spcAft>
+              <a:buSzPct val="100000"/>
               <a:buChar char="•"/>
               <a:lnSpc>
                 <a:spcPts val="2200"/>
@@ -4562,10 +4576,12 @@
             </a:r>
           </a:p>
           <a:p>
-            <a:pPr>
+            <a:pPr lvl="0" marL="457200" indent="-228600">
+              <a:buFont typeface="Calibri"/>
               <a:spcAft>
                 <a:spcPts val="1000"/>
               </a:spcAft>
+              <a:buSzPct val="100000"/>
               <a:buChar char="•"/>
               <a:lnSpc>
                 <a:spcPts val="2200"/>
@@ -4701,10 +4717,12 @@
           </a:bodyPr>
           <a:lstStyle/>
           <a:p>
-            <a:pPr>
+            <a:pPr lvl="0" marL="457200" indent="-228600">
+              <a:buFont typeface="Calibri"/>
               <a:spcAft>
                 <a:spcPts val="1000"/>
               </a:spcAft>
+              <a:buSzPct val="100000"/>
               <a:buChar char="•"/>
               <a:lnSpc>
                 <a:spcPts val="2200"/>
@@ -4721,10 +4739,12 @@
             </a:r>
           </a:p>
           <a:p>
-            <a:pPr>
+            <a:pPr lvl="0" marL="457200" indent="-228600">
+              <a:buFont typeface="Calibri"/>
               <a:spcAft>
                 <a:spcPts val="1000"/>
               </a:spcAft>
+              <a:buSzPct val="100000"/>
               <a:buChar char="•"/>
               <a:lnSpc>
                 <a:spcPts val="2200"/>
@@ -4860,10 +4880,12 @@
           </a:bodyPr>
           <a:lstStyle/>
           <a:p>
-            <a:pPr>
+            <a:pPr lvl="0" marL="457200" indent="-228600">
+              <a:buFont typeface="Calibri"/>
               <a:spcAft>
                 <a:spcPts val="1000"/>
               </a:spcAft>
+              <a:buSzPct val="100000"/>
               <a:buChar char="•"/>
               <a:lnSpc>
                 <a:spcPts val="2200"/>
@@ -4880,10 +4902,12 @@
             </a:r>
           </a:p>
           <a:p>
-            <a:pPr>
+            <a:pPr lvl="0" marL="457200" indent="-228600">
+              <a:buFont typeface="Calibri"/>
               <a:spcAft>
                 <a:spcPts val="1000"/>
               </a:spcAft>
+              <a:buSzPct val="100000"/>
               <a:buChar char="•"/>
               <a:lnSpc>
                 <a:spcPts val="2200"/>
@@ -4900,10 +4924,12 @@
             </a:r>
           </a:p>
           <a:p>
-            <a:pPr>
+            <a:pPr lvl="0" marL="457200" indent="-228600">
+              <a:buFont typeface="Calibri"/>
               <a:spcAft>
                 <a:spcPts val="1000"/>
               </a:spcAft>
+              <a:buSzPct val="100000"/>
               <a:buChar char="•"/>
               <a:lnSpc>
                 <a:spcPts val="2200"/>
@@ -5039,10 +5065,12 @@
           </a:bodyPr>
           <a:lstStyle/>
           <a:p>
-            <a:pPr>
+            <a:pPr lvl="0" marL="457200" indent="-228600">
+              <a:buFont typeface="Calibri"/>
               <a:spcAft>
                 <a:spcPts val="1000"/>
               </a:spcAft>
+              <a:buSzPct val="100000"/>
               <a:buChar char="•"/>
               <a:lnSpc>
                 <a:spcPts val="2200"/>
@@ -5059,10 +5087,12 @@
             </a:r>
           </a:p>
           <a:p>
-            <a:pPr>
+            <a:pPr lvl="0" marL="457200" indent="-228600">
+              <a:buFont typeface="Calibri"/>
               <a:spcAft>
                 <a:spcPts val="1000"/>
               </a:spcAft>
+              <a:buSzPct val="100000"/>
               <a:buChar char="•"/>
               <a:lnSpc>
                 <a:spcPts val="2200"/>
@@ -5198,10 +5228,12 @@
           </a:bodyPr>
           <a:lstStyle/>
           <a:p>
-            <a:pPr>
+            <a:pPr lvl="0" marL="457200" indent="-228600">
+              <a:buFont typeface="Calibri"/>
               <a:spcAft>
                 <a:spcPts val="1000"/>
               </a:spcAft>
+              <a:buSzPct val="100000"/>
               <a:buChar char="•"/>
               <a:lnSpc>
                 <a:spcPts val="2200"/>
@@ -5218,10 +5250,12 @@
             </a:r>
           </a:p>
           <a:p>
-            <a:pPr>
+            <a:pPr lvl="0" marL="457200" indent="-228600">
+              <a:buFont typeface="Calibri"/>
               <a:spcAft>
                 <a:spcPts val="1000"/>
               </a:spcAft>
+              <a:buSzPct val="100000"/>
               <a:buChar char="•"/>
               <a:lnSpc>
                 <a:spcPts val="2200"/>
